--- a/Last/LEC/03-2_TSMetrics.pptx
+++ b/Last/LEC/03-2_TSMetrics.pptx
@@ -216,7 +216,7 @@
           <a:p>
             <a:fld id="{CDA96C9A-3213-B245-BC64-7E419D14BD9D}" type="datetimeFigureOut">
               <a:rPr lang="ru-RU" smtClean="0"/>
-              <a:t>19.03.2026</a:t>
+              <a:t>19.10.2026</a:t>
             </a:fld>
             <a:endParaRPr lang="ru-RU"/>
           </a:p>
@@ -5410,7 +5410,7 @@
           <a:p>
             <a:fld id="{BEE214BE-636D-8A45-BCA6-8B7ED77AA124}" type="datetime1">
               <a:rPr lang="ru-RU" smtClean="0"/>
-              <a:t>19.03.2026</a:t>
+              <a:t>19.10.2026</a:t>
             </a:fld>
             <a:endParaRPr lang="en-US"/>
           </a:p>
@@ -5580,7 +5580,7 @@
           <a:p>
             <a:fld id="{5855274A-4ED4-0146-A3E9-88EF200B5196}" type="datetime1">
               <a:rPr lang="ru-RU" smtClean="0"/>
-              <a:t>19.03.2026</a:t>
+              <a:t>19.10.2026</a:t>
             </a:fld>
             <a:endParaRPr lang="en-US"/>
           </a:p>
@@ -5760,7 +5760,7 @@
           <a:p>
             <a:fld id="{8A78DFF1-9FDC-144B-973E-B4B4609709DF}" type="datetime1">
               <a:rPr lang="ru-RU" smtClean="0"/>
-              <a:t>19.03.2026</a:t>
+              <a:t>19.10.2026</a:t>
             </a:fld>
             <a:endParaRPr lang="en-US"/>
           </a:p>
@@ -5930,7 +5930,7 @@
           <a:p>
             <a:fld id="{8233A339-F8AE-5C45-BEAE-07EF9DC78B60}" type="datetime1">
               <a:rPr lang="ru-RU" smtClean="0"/>
-              <a:t>19.03.2026</a:t>
+              <a:t>19.10.2026</a:t>
             </a:fld>
             <a:endParaRPr lang="en-US"/>
           </a:p>
@@ -6176,7 +6176,7 @@
           <a:p>
             <a:fld id="{7586FDE4-97E0-CE4A-988C-F30B221290A7}" type="datetime1">
               <a:rPr lang="ru-RU" smtClean="0"/>
-              <a:t>19.03.2026</a:t>
+              <a:t>19.10.2026</a:t>
             </a:fld>
             <a:endParaRPr lang="en-US"/>
           </a:p>
@@ -6408,7 +6408,7 @@
           <a:p>
             <a:fld id="{C36ECE8B-8DEC-154E-9F03-047C8DDA20DC}" type="datetime1">
               <a:rPr lang="ru-RU" smtClean="0"/>
-              <a:t>19.03.2026</a:t>
+              <a:t>19.10.2026</a:t>
             </a:fld>
             <a:endParaRPr lang="en-US"/>
           </a:p>
@@ -6775,7 +6775,7 @@
           <a:p>
             <a:fld id="{440816D5-BDB8-B34B-8ACA-ECBDD12E7321}" type="datetime1">
               <a:rPr lang="ru-RU" smtClean="0"/>
-              <a:t>19.03.2026</a:t>
+              <a:t>19.10.2026</a:t>
             </a:fld>
             <a:endParaRPr lang="en-US"/>
           </a:p>
@@ -6893,7 +6893,7 @@
           <a:p>
             <a:fld id="{8A8C589A-5627-764C-AF96-C1E2F9A00A4D}" type="datetime1">
               <a:rPr lang="ru-RU" smtClean="0"/>
-              <a:t>19.03.2026</a:t>
+              <a:t>19.10.2026</a:t>
             </a:fld>
             <a:endParaRPr lang="en-US"/>
           </a:p>
@@ -6988,7 +6988,7 @@
           <a:p>
             <a:fld id="{603EE0D0-1696-6D4F-B917-4AFB24A74E8B}" type="datetime1">
               <a:rPr lang="ru-RU" smtClean="0"/>
-              <a:t>19.03.2026</a:t>
+              <a:t>19.10.2026</a:t>
             </a:fld>
             <a:endParaRPr lang="en-US"/>
           </a:p>
@@ -7265,7 +7265,7 @@
           <a:p>
             <a:fld id="{13C8A91E-B09B-2240-9AA3-B1D4BCC6296E}" type="datetime1">
               <a:rPr lang="ru-RU" smtClean="0"/>
-              <a:t>19.03.2026</a:t>
+              <a:t>19.10.2026</a:t>
             </a:fld>
             <a:endParaRPr lang="en-US"/>
           </a:p>
@@ -7522,7 +7522,7 @@
           <a:p>
             <a:fld id="{3BE9760E-DA8D-6747-B31E-62858C8727B8}" type="datetime1">
               <a:rPr lang="ru-RU" smtClean="0"/>
-              <a:t>19.03.2026</a:t>
+              <a:t>19.10.2026</a:t>
             </a:fld>
             <a:endParaRPr lang="en-US"/>
           </a:p>
@@ -7735,7 +7735,7 @@
           <a:p>
             <a:fld id="{D31305DF-F750-CC43-967D-51A20925EE94}" type="datetime1">
               <a:rPr lang="ru-RU" smtClean="0"/>
-              <a:t>19.03.2026</a:t>
+              <a:t>19.10.2026</a:t>
             </a:fld>
             <a:endParaRPr lang="en-US"/>
           </a:p>
@@ -9970,8 +9970,8 @@
           </a:p>
         </p:txBody>
       </p:sp>
-      <mc:AlternateContent xmlns:mc="http://schemas.openxmlformats.org/markup-compatibility/2006">
-        <mc:Choice xmlns:a14="http://schemas.microsoft.com/office/drawing/2010/main" Requires="a14">
+      <mc:AlternateContent xmlns:mc="http://schemas.openxmlformats.org/markup-compatibility/2006" xmlns:a14="http://schemas.microsoft.com/office/drawing/2010/main">
+        <mc:Choice Requires="a14">
           <p:sp>
             <p:nvSpPr>
               <p:cNvPr id="7" name="Прямоугольник 6"/>
@@ -10535,7 +10535,7 @@
             </p:txBody>
           </p:sp>
         </mc:Choice>
-        <mc:Fallback>
+        <mc:Fallback xmlns="">
           <p:sp>
             <p:nvSpPr>
               <p:cNvPr id="7" name="Прямоугольник 6"/>
@@ -22230,8 +22230,8 @@
           </a:p>
         </p:txBody>
       </p:sp>
-      <mc:AlternateContent xmlns:mc="http://schemas.openxmlformats.org/markup-compatibility/2006" xmlns:a14="http://schemas.microsoft.com/office/drawing/2010/main">
-        <mc:Choice Requires="a14">
+      <mc:AlternateContent xmlns:mc="http://schemas.openxmlformats.org/markup-compatibility/2006">
+        <mc:Choice xmlns:a14="http://schemas.microsoft.com/office/drawing/2010/main" Requires="a14">
           <p:graphicFrame>
             <p:nvGraphicFramePr>
               <p:cNvPr id="3" name="Таблица 2"/>
@@ -22241,7 +22241,7 @@
               <p:nvPr>
                 <p:extLst>
                   <p:ext uri="{D42A27DB-BD31-4B8C-83A1-F6EECF244321}">
-                    <p14:modId xmlns:p14="http://schemas.microsoft.com/office/powerpoint/2010/main" val="4266244280"/>
+                    <p14:modId xmlns:p14="http://schemas.microsoft.com/office/powerpoint/2010/main" val="4210042047"/>
                   </p:ext>
                 </p:extLst>
               </p:nvPr>
@@ -22727,6 +22727,12 @@
                             </a:rPr>
                             <a:t> </a:t>
                           </a:r>
+                          <a:r>
+                            <a:rPr lang="en-US" sz="2000" kern="100" dirty="0" smtClean="0">
+                              <a:effectLst/>
+                            </a:rPr>
+                            <a:t>R2adj</a:t>
+                          </a:r>
                           <a:endParaRPr lang="ru-RU" sz="2000" kern="100" dirty="0">
                             <a:effectLst/>
                             <a:latin typeface="Calibri" panose="020F0502020204030204" pitchFamily="34" charset="0"/>
@@ -22791,12 +22797,12 @@
                             </a:spcAft>
                           </a:pPr>
                           <a:r>
-                            <a:rPr lang="ru-RU" sz="2000" kern="100">
+                            <a:rPr lang="ru-RU" sz="2000" kern="100" dirty="0">
                               <a:effectLst/>
                             </a:rPr>
                             <a:t>Интервальный</a:t>
                           </a:r>
-                          <a:endParaRPr lang="ru-RU" sz="2000" kern="100">
+                          <a:endParaRPr lang="ru-RU" sz="2000" kern="100" dirty="0">
                             <a:effectLst/>
                             <a:latin typeface="Calibri" panose="020F0502020204030204" pitchFamily="34" charset="0"/>
                             <a:ea typeface="Calibri" panose="020F0502020204030204" pitchFamily="34" charset="0"/>
@@ -23024,12 +23030,12 @@
                             </a:spcAft>
                           </a:pPr>
                           <a:r>
-                            <a:rPr lang="ru-RU" sz="2000" kern="100">
+                            <a:rPr lang="ru-RU" sz="2000" kern="100" dirty="0" err="1">
                               <a:effectLst/>
                             </a:rPr>
                             <a:t>Квантильный</a:t>
                           </a:r>
-                          <a:endParaRPr lang="ru-RU" sz="2000" kern="100">
+                          <a:endParaRPr lang="ru-RU" sz="2000" kern="100" dirty="0">
                             <a:effectLst/>
                             <a:latin typeface="Calibri" panose="020F0502020204030204" pitchFamily="34" charset="0"/>
                             <a:ea typeface="Calibri" panose="020F0502020204030204" pitchFamily="34" charset="0"/>
@@ -23208,12 +23214,12 @@
                             </a:spcAft>
                           </a:pPr>
                           <a:r>
-                            <a:rPr lang="ru-RU" sz="2000" kern="100">
+                            <a:rPr lang="ru-RU" sz="2000" kern="100" dirty="0">
                               <a:effectLst/>
                             </a:rPr>
                             <a:t>Вероятностный</a:t>
                           </a:r>
-                          <a:endParaRPr lang="ru-RU" sz="2000" kern="100">
+                          <a:endParaRPr lang="ru-RU" sz="2000" kern="100" dirty="0">
                             <a:effectLst/>
                             <a:latin typeface="Calibri" panose="020F0502020204030204" pitchFamily="34" charset="0"/>
                             <a:ea typeface="Calibri" panose="020F0502020204030204" pitchFamily="34" charset="0"/>
@@ -23319,12 +23325,12 @@
                             </a:spcAft>
                           </a:pPr>
                           <a:r>
-                            <a:rPr lang="ru-RU" sz="2000" kern="100">
+                            <a:rPr lang="ru-RU" sz="2000" kern="100" dirty="0">
                               <a:effectLst/>
                             </a:rPr>
                             <a:t>качество всего прогнозного распределения </a:t>
                           </a:r>
-                          <a:endParaRPr lang="ru-RU" sz="2000" kern="100">
+                          <a:endParaRPr lang="ru-RU" sz="2000" kern="100" dirty="0">
                             <a:effectLst/>
                             <a:latin typeface="Calibri" panose="020F0502020204030204" pitchFamily="34" charset="0"/>
                             <a:ea typeface="Calibri" panose="020F0502020204030204" pitchFamily="34" charset="0"/>
@@ -23403,7 +23409,7 @@
             </a:graphic>
           </p:graphicFrame>
         </mc:Choice>
-        <mc:Fallback xmlns="">
+        <mc:Fallback>
           <p:graphicFrame>
             <p:nvGraphicFramePr>
               <p:cNvPr id="3" name="Таблица 2"/>
@@ -23413,7 +23419,7 @@
               <p:nvPr>
                 <p:extLst>
                   <p:ext uri="{D42A27DB-BD31-4B8C-83A1-F6EECF244321}">
-                    <p14:modId xmlns:p14="http://schemas.microsoft.com/office/powerpoint/2010/main" val="4266244280"/>
+                    <p14:modId xmlns:p14="http://schemas.microsoft.com/office/powerpoint/2010/main" val="4210042047"/>
                   </p:ext>
                 </p:extLst>
               </p:nvPr>
@@ -23567,7 +23573,7 @@
                             </a:spcAft>
                           </a:pPr>
                           <a:r>
-                            <a:rPr lang="ru-RU" sz="2000" kern="100" dirty="0" smtClean="0">
+                            <a:rPr lang="ru-RU" sz="2000" kern="100" dirty="0">
                               <a:effectLst/>
                             </a:rPr>
                             <a:t>Метрики</a:t>
@@ -23632,7 +23638,7 @@
                             </a:spcAft>
                           </a:pPr>
                           <a:r>
-                            <a:rPr lang="ru-RU" sz="2000" kern="100" dirty="0" smtClean="0">
+                            <a:rPr lang="ru-RU" sz="2000" kern="100" dirty="0">
                               <a:effectLst/>
                             </a:rPr>
                             <a:t>Точечный</a:t>
@@ -23760,22 +23766,16 @@
                             </a:spcAft>
                           </a:pPr>
                           <a:r>
-                            <a:rPr lang="ru-RU" sz="2000" kern="100" dirty="0" err="1" smtClean="0">
+                            <a:rPr lang="ru-RU" sz="2000" kern="100" dirty="0" err="1">
                               <a:effectLst/>
                             </a:rPr>
                             <a:t>неучитывает</a:t>
                           </a:r>
                           <a:r>
-                            <a:rPr lang="ru-RU" sz="2000" kern="100" dirty="0" smtClean="0">
-                              <a:effectLst/>
-                            </a:rPr>
-                            <a:t> </a:t>
-                          </a:r>
-                          <a:r>
                             <a:rPr lang="ru-RU" sz="2000" kern="100" dirty="0">
                               <a:effectLst/>
                             </a:rPr>
-                            <a:t>особенности разброса оценки</a:t>
+                            <a:t> особенности разброса оценки</a:t>
                           </a:r>
                           <a:endParaRPr lang="ru-RU" sz="2000" kern="100" dirty="0">
                             <a:effectLst/>
@@ -23808,7 +23808,7 @@
                             </a:spcAft>
                           </a:pPr>
                           <a:r>
-                            <a:rPr lang="ru-RU" sz="2000" kern="100" dirty="0" smtClean="0">
+                            <a:rPr lang="ru-RU" sz="2000" kern="100" dirty="0">
                               <a:effectLst/>
                             </a:rPr>
                             <a:t>Дисперсия</a:t>
@@ -23840,13 +23840,7 @@
                             <a:rPr lang="ru-RU" sz="2000" kern="100" dirty="0">
                               <a:effectLst/>
                             </a:rPr>
-                            <a:t>СКО и </a:t>
-                          </a:r>
-                          <a:r>
-                            <a:rPr lang="ru-RU" sz="2000" kern="100" dirty="0" smtClean="0">
-                              <a:effectLst/>
-                            </a:rPr>
-                            <a:t>неопределенность прогноза</a:t>
+                            <a:t>СКО и неопределенность прогноза</a:t>
                           </a:r>
                           <a:endParaRPr lang="ru-RU" sz="2000" kern="100" dirty="0">
                             <a:effectLst/>
@@ -23872,7 +23866,7 @@
                             </a:spcAft>
                           </a:pPr>
                           <a:r>
-                            <a:rPr lang="ru-RU" sz="1800" kern="1200" dirty="0" smtClean="0">
+                            <a:rPr lang="ru-RU" sz="1800" kern="1200" dirty="0">
                               <a:effectLst/>
                             </a:rPr>
                             <a:t>Оценить разброс и надежность прогноза</a:t>
@@ -23900,16 +23894,22 @@
                             </a:spcAft>
                           </a:pPr>
                           <a:r>
-                            <a:rPr lang="en-US" sz="2000" kern="100" dirty="0" smtClean="0">
+                            <a:rPr lang="en-US" sz="2000" kern="100" dirty="0">
                               <a:effectLst/>
                             </a:rPr>
                             <a:t>R2,</a:t>
                           </a:r>
                           <a:r>
-                            <a:rPr lang="en-US" sz="2000" kern="100" baseline="0" dirty="0" smtClean="0">
+                            <a:rPr lang="en-US" sz="2000" kern="100" baseline="0" dirty="0">
                               <a:effectLst/>
                             </a:rPr>
                             <a:t> </a:t>
+                          </a:r>
+                          <a:r>
+                            <a:rPr lang="en-US" sz="2000" kern="100" dirty="0" smtClean="0">
+                              <a:effectLst/>
+                            </a:rPr>
+                            <a:t>R2adj</a:t>
                           </a:r>
                           <a:endParaRPr lang="ru-RU" sz="2000" kern="100" dirty="0">
                             <a:effectLst/>
@@ -23934,13 +23934,13 @@
                             </a:spcAft>
                           </a:pPr>
                           <a:r>
-                            <a:rPr lang="ru-RU" sz="2000" kern="100" dirty="0" smtClean="0">
+                            <a:rPr lang="ru-RU" sz="2000" kern="100" dirty="0">
                               <a:effectLst/>
                             </a:rPr>
                             <a:t>Используется в дополнение</a:t>
                           </a:r>
                           <a:r>
-                            <a:rPr lang="ru-RU" sz="2000" kern="100" baseline="0" dirty="0" smtClean="0">
+                            <a:rPr lang="ru-RU" sz="2000" kern="100" baseline="0" dirty="0">
                               <a:effectLst/>
                             </a:rPr>
                             <a:t> к остальным </a:t>
@@ -23975,12 +23975,12 @@
                             </a:spcAft>
                           </a:pPr>
                           <a:r>
-                            <a:rPr lang="ru-RU" sz="2000" kern="100">
+                            <a:rPr lang="ru-RU" sz="2000" kern="100" dirty="0">
                               <a:effectLst/>
                             </a:rPr>
                             <a:t>Интервальный</a:t>
                           </a:r>
-                          <a:endParaRPr lang="ru-RU" sz="2000" kern="100">
+                          <a:endParaRPr lang="ru-RU" sz="2000" kern="100" dirty="0">
                             <a:effectLst/>
                             <a:latin typeface="Calibri" panose="020F0502020204030204" pitchFamily="34" charset="0"/>
                             <a:ea typeface="Calibri" panose="020F0502020204030204" pitchFamily="34" charset="0"/>
@@ -24115,12 +24115,12 @@
                             </a:spcAft>
                           </a:pPr>
                           <a:r>
-                            <a:rPr lang="ru-RU" sz="2000" kern="100">
+                            <a:rPr lang="ru-RU" sz="2000" kern="100" dirty="0" err="1">
                               <a:effectLst/>
                             </a:rPr>
                             <a:t>Квантильный</a:t>
                           </a:r>
-                          <a:endParaRPr lang="ru-RU" sz="2000" kern="100">
+                          <a:endParaRPr lang="ru-RU" sz="2000" kern="100" dirty="0">
                             <a:effectLst/>
                             <a:latin typeface="Calibri" panose="020F0502020204030204" pitchFamily="34" charset="0"/>
                             <a:ea typeface="Calibri" panose="020F0502020204030204" pitchFamily="34" charset="0"/>
@@ -24255,12 +24255,12 @@
                             </a:spcAft>
                           </a:pPr>
                           <a:r>
-                            <a:rPr lang="ru-RU" sz="2000" kern="100">
+                            <a:rPr lang="ru-RU" sz="2000" kern="100" dirty="0">
                               <a:effectLst/>
                             </a:rPr>
                             <a:t>Вероятностный</a:t>
                           </a:r>
-                          <a:endParaRPr lang="ru-RU" sz="2000" kern="100">
+                          <a:endParaRPr lang="ru-RU" sz="2000" kern="100" dirty="0">
                             <a:effectLst/>
                             <a:latin typeface="Calibri" panose="020F0502020204030204" pitchFamily="34" charset="0"/>
                             <a:ea typeface="Calibri" panose="020F0502020204030204" pitchFamily="34" charset="0"/>
@@ -24301,12 +24301,12 @@
                             </a:spcAft>
                           </a:pPr>
                           <a:r>
-                            <a:rPr lang="ru-RU" sz="2000" kern="100">
+                            <a:rPr lang="ru-RU" sz="2000" kern="100" dirty="0">
                               <a:effectLst/>
                             </a:rPr>
                             <a:t>качество всего прогнозного распределения </a:t>
                           </a:r>
-                          <a:endParaRPr lang="ru-RU" sz="2000" kern="100">
+                          <a:endParaRPr lang="ru-RU" sz="2000" kern="100" dirty="0">
                             <a:effectLst/>
                             <a:latin typeface="Calibri" panose="020F0502020204030204" pitchFamily="34" charset="0"/>
                             <a:ea typeface="Calibri" panose="020F0502020204030204" pitchFamily="34" charset="0"/>
